--- a/1차 개발 설계서/UI/05 UI 설계.pptx
+++ b/1차 개발 설계서/UI/05 UI 설계.pptx
@@ -1856,7 +1856,12 @@
           </a:p>
           <a:p>
             <a:r>
-              <a:t>권한: 현재 방장</a:t>
+              <a:t>권한: 모든 현재 참여자(방장 포함)</a:t>
+            </a:r>
+          </a:p>
+          <a:p>
+            <a:r>
+              <a:t>모든 현재 참여자가 같은 모임의 초대를 조회·발급·공유·복사·취소한다. 발급자 본인 여부는 관리 권한의 기준이 아니다. 참여 종료·모임 종료·이용 제한은 서버가 재검증한다.</a:t>
             </a:r>
           </a:p>
           <a:p>
@@ -1876,7 +1881,7 @@
           </a:p>
           <a:p>
             <a:r>
-              <a:t>상태: 발급 실패·결과 불명 / 취소·만료·소진 / 정원10명 / 일반 참여자 권한 거부</a:t>
+              <a:t>상태: 발급 실패·결과 불명 / 취소·만료·소진 / 정원10명 / 일반 참여자 동일 권한 / 비참여·탈퇴·퇴장·이용 제한 거부</a:t>
             </a:r>
           </a:p>
           <a:p>
@@ -3371,7 +3376,7 @@
           </a:p>
           <a:p>
             <a:r>
-              <a:t>③ 보기 방식은 기기에 보관한다. ④ 현재 방장만 UI06에서 일정을 수동 추가한다. 반복 생성은 없다. 뒤로 오면 월·선택·스크롤을 복원한다.</a:t>
+              <a:t>③ 초대·관리에서 모든 현재 참여자가 UI23에 진입한다. 보기 방식은 기기에 보관한다. ④ 현재 방장만 UI06에서 일정을 수동 추가한다. 반복 생성은 없다. 뒤로 오면 월·선택·스크롤을 복원한다.</a:t>
             </a:r>
           </a:p>
           <a:p>
@@ -6903,7 +6908,7 @@
               </a:defRPr>
             </a:pPr>
             <a:r>
-              <a:t>편집 가능한 화면 원본 · 기능명세서 v2(2026-10-20 회의 반영) 기준  ·  2026-10-22</a:t>
+              <a:t>편집 가능한 화면 원본 · 기능명세서 v2.1(2026-10-24) 기준  ·  2026-10-24</a:t>
             </a:r>
           </a:p>
         </p:txBody>
@@ -8204,7 +8209,7 @@
               </a:defRPr>
             </a:pPr>
             <a:r>
-              <a:t>1차 신규 설계안 · 도형/텍스트 개별 편집 가능 · F06 / F09 / F16 / F21  ·  2026-10-22</a:t>
+              <a:t>1차 신규 설계안 · 도형/텍스트 개별 편집 가능 · F06 / F09 / F16 / F21  ·  2026-10-24</a:t>
             </a:r>
           </a:p>
         </p:txBody>
@@ -9718,7 +9723,7 @@
               </a:defRPr>
             </a:pPr>
             <a:r>
-              <a:t>1차 신규 설계안 · 도형/텍스트 개별 편집 가능 · F16 / F17 / F19  ·  2026-10-22</a:t>
+              <a:t>1차 신규 설계안 · 도형/텍스트 개별 편집 가능 · F16 / F17 / F19  ·  2026-10-24</a:t>
             </a:r>
           </a:p>
         </p:txBody>
@@ -11309,7 +11314,7 @@
               </a:defRPr>
             </a:pPr>
             <a:r>
-              <a:t>1차 신규 설계안 · 도형/텍스트 개별 편집 가능 · F09  ·  2026-10-22</a:t>
+              <a:t>1차 신규 설계안 · 도형/텍스트 개별 편집 가능 · F09  ·  2026-10-24</a:t>
             </a:r>
           </a:p>
         </p:txBody>
@@ -12992,7 +12997,7 @@
               </a:defRPr>
             </a:pPr>
             <a:r>
-              <a:t>1차 신규 설계안 · 도형/텍스트 개별 편집 가능 · F09  ·  2026-10-22</a:t>
+              <a:t>1차 신규 설계안 · 도형/텍스트 개별 편집 가능 · F09  ·  2026-10-24</a:t>
             </a:r>
           </a:p>
         </p:txBody>
@@ -14556,7 +14561,7 @@
               </a:defRPr>
             </a:pPr>
             <a:r>
-              <a:t>1차 신규 설계안 · 도형/텍스트 개별 편집 가능 · F10 / F11  ·  2026-10-22</a:t>
+              <a:t>1차 신규 설계안 · 도형/텍스트 개별 편집 가능 · F10 / F11  ·  2026-10-24</a:t>
             </a:r>
           </a:p>
         </p:txBody>
@@ -15895,7 +15900,7 @@
               </a:defRPr>
             </a:pPr>
             <a:r>
-              <a:t>1차 신규 설계안 · 도형/텍스트 개별 편집 가능 · F09 / F14 / F16  ·  2026-10-22</a:t>
+              <a:t>1차 신규 설계안 · 도형/텍스트 개별 편집 가능 · F09 / F14 / F16  ·  2026-10-24</a:t>
             </a:r>
           </a:p>
         </p:txBody>
@@ -17344,7 +17349,7 @@
               </a:defRPr>
             </a:pPr>
             <a:r>
-              <a:t>1차 신규 설계안 · 도형/텍스트 개별 편집 가능 · F12 / F13 / F14  ·  2026-10-22</a:t>
+              <a:t>1차 신규 설계안 · 도형/텍스트 개별 편집 가능 · F12 / F13 / F14  ·  2026-10-24</a:t>
             </a:r>
           </a:p>
         </p:txBody>
@@ -18609,7 +18614,7 @@
               </a:defRPr>
             </a:pPr>
             <a:r>
-              <a:t>1차 신규 설계안 · 도형/텍스트 개별 편집 가능 · F12  ·  2026-10-22</a:t>
+              <a:t>1차 신규 설계안 · 도형/텍스트 개별 편집 가능 · F12  ·  2026-10-24</a:t>
             </a:r>
           </a:p>
         </p:txBody>
@@ -19896,7 +19901,7 @@
               </a:defRPr>
             </a:pPr>
             <a:r>
-              <a:t>1차 신규 설계안 · 도형/텍스트 개별 편집 가능 · F13 / F14 / F17 / F18 / F19  ·  2026-10-22</a:t>
+              <a:t>1차 신규 설계안 · 도형/텍스트 개별 편집 가능 · F13 / F14 / F17 / F18 / F19  ·  2026-10-24</a:t>
             </a:r>
           </a:p>
         </p:txBody>
@@ -21504,7 +21509,7 @@
               </a:defRPr>
             </a:pPr>
             <a:r>
-              <a:t>1차 신규 설계안 · 도형/텍스트 개별 편집 가능 · F15 / F20 / F26  ·  2026-10-22</a:t>
+              <a:t>1차 신규 설계안 · 도형/텍스트 개별 편집 가능 · F15 / F20 / F26  ·  2026-10-24</a:t>
             </a:r>
           </a:p>
         </p:txBody>
@@ -22874,7 +22879,7 @@
               </a:defRPr>
             </a:pPr>
             <a:r>
-              <a:t>날짜는 일정 내부의 정리·필터 속성  ·  2026-10-22</a:t>
+              <a:t>날짜는 일정 내부의 정리·필터 속성  ·  2026-10-24</a:t>
             </a:r>
           </a:p>
         </p:txBody>
@@ -23811,7 +23816,7 @@
               </a:defRPr>
             </a:pPr>
             <a:r>
-              <a:t>1차 신규 설계안 · 도형/텍스트 개별 편집 가능 · F16 / F17 / F18 / F19 / F25  ·  2026-10-22</a:t>
+              <a:t>1차 신규 설계안 · 도형/텍스트 개별 편집 가능 · F16 / F17 / F18 / F19 / F25  ·  2026-10-24</a:t>
             </a:r>
           </a:p>
         </p:txBody>
@@ -25192,7 +25197,7 @@
               </a:defRPr>
             </a:pPr>
             <a:r>
-              <a:t>1차 신규 설계안 · 도형/텍스트 개별 편집 가능 · F17  ·  2026-10-22</a:t>
+              <a:t>1차 신규 설계안 · 도형/텍스트 개별 편집 가능 · F17  ·  2026-10-24</a:t>
             </a:r>
           </a:p>
         </p:txBody>
@@ -26681,7 +26686,7 @@
               </a:defRPr>
             </a:pPr>
             <a:r>
-              <a:t>1차 신규 설계안 · 도형/텍스트 개별 편집 가능 · F19 / F20  ·  2026-10-22</a:t>
+              <a:t>1차 신규 설계안 · 도형/텍스트 개별 편집 가능 · F19 / F20  ·  2026-10-24</a:t>
             </a:r>
           </a:p>
         </p:txBody>
@@ -27938,7 +27943,7 @@
               </a:defRPr>
             </a:pPr>
             <a:r>
-              <a:t>1차 신규 설계안 · 도형/텍스트 개별 편집 가능 · F18 / F21  ·  2026-10-22</a:t>
+              <a:t>1차 신규 설계안 · 도형/텍스트 개별 편집 가능 · F18 / F21  ·  2026-10-24</a:t>
             </a:r>
           </a:p>
         </p:txBody>
@@ -29539,7 +29544,7 @@
               </a:defRPr>
             </a:pPr>
             <a:r>
-              <a:t>1차 신규 설계안 · 도형/텍스트 개별 편집 가능 · F05  ·  2026-10-22</a:t>
+              <a:t>1차 신규 설계안 · 도형/텍스트 개별 편집 가능 · F05  ·  2026-10-24</a:t>
             </a:r>
           </a:p>
         </p:txBody>
@@ -30577,7 +30582,7 @@
               </a:defRPr>
             </a:pPr>
             <a:r>
-              <a:t>대상  현재 방장</a:t>
+              <a:t>대상  모든 현재 참여자(방장 포함)</a:t>
             </a:r>
           </a:p>
         </p:txBody>
@@ -30616,6 +30621,77 @@
               </a:defRPr>
             </a:pPr>
             <a:r>
+              <a:t>모든 현재 참여자가 같은 모임의 초대를</a:t>
+            </a:r>
+          </a:p>
+          <a:p>
+            <a:pPr>
+              <a:spcAft>
+                <a:spcPts val="100"/>
+              </a:spcAft>
+              <a:defRPr sz="1700" b="0">
+                <a:solidFill>
+                  <a:srgbClr val="191F28"/>
+                </a:solidFill>
+                <a:latin typeface="Noto Sans CJK KR"/>
+              </a:defRPr>
+            </a:pPr>
+            <a:r>
+              <a:t>조회·발급·공유·복사·취소한다. 발급자 본인 여부는 관리 권한의</a:t>
+            </a:r>
+          </a:p>
+          <a:p>
+            <a:pPr>
+              <a:spcAft>
+                <a:spcPts val="100"/>
+              </a:spcAft>
+              <a:defRPr sz="1700" b="0">
+                <a:solidFill>
+                  <a:srgbClr val="191F28"/>
+                </a:solidFill>
+                <a:latin typeface="Noto Sans CJK KR"/>
+              </a:defRPr>
+            </a:pPr>
+            <a:r>
+              <a:t>기준이 아니다. 참여 종료·모임 종료·이용 제한은 서버가 재검증한다.</a:t>
+            </a:r>
+          </a:p>
+        </p:txBody>
+      </p:sp>
+      <p:sp>
+        <p:nvSpPr>
+          <p:cNvPr id="27" name="TextBox 26"/>
+          <p:cNvSpPr txBox="1"/>
+          <p:nvPr/>
+        </p:nvSpPr>
+        <p:spPr>
+          <a:xfrm>
+            <a:off x="6629400" y="2816352"/>
+            <a:ext cx="7406640" cy="877824"/>
+          </a:xfrm>
+          <a:prstGeom prst="rect">
+            <a:avLst/>
+          </a:prstGeom>
+          <a:noFill/>
+        </p:spPr>
+        <p:txBody>
+          <a:bodyPr wrap="square" lIns="0" rIns="0" tIns="0" bIns="0">
+            <a:spAutoFit/>
+          </a:bodyPr>
+          <a:lstStyle/>
+          <a:p>
+            <a:pPr>
+              <a:spcAft>
+                <a:spcPts val="100"/>
+              </a:spcAft>
+              <a:defRPr sz="1700" b="0">
+                <a:solidFill>
+                  <a:srgbClr val="191F28"/>
+                </a:solidFill>
+                <a:latin typeface="Noto Sans CJK KR"/>
+              </a:defRPr>
+            </a:pPr>
+            <a:r>
               <a:t>코드 길이8자는 기술 설계안이며 기능명세의 고정 정책이 아니다.</a:t>
             </a:r>
           </a:p>
@@ -30655,13 +30731,13 @@
       </p:sp>
       <p:sp>
         <p:nvSpPr>
-          <p:cNvPr id="27" name="TextBox 26"/>
-          <p:cNvSpPr txBox="1"/>
-          <p:nvPr/>
-        </p:nvSpPr>
-        <p:spPr>
-          <a:xfrm>
-            <a:off x="6629400" y="2816352"/>
+          <p:cNvPr id="28" name="TextBox 27"/>
+          <p:cNvSpPr txBox="1"/>
+          <p:nvPr/>
+        </p:nvSpPr>
+        <p:spPr>
+          <a:xfrm>
+            <a:off x="6629400" y="3849624"/>
             <a:ext cx="7406640" cy="640080"/>
           </a:xfrm>
           <a:prstGeom prst="rect">
@@ -30710,13 +30786,13 @@
       </p:sp>
       <p:sp>
         <p:nvSpPr>
-          <p:cNvPr id="28" name="TextBox 27"/>
-          <p:cNvSpPr txBox="1"/>
-          <p:nvPr/>
-        </p:nvSpPr>
-        <p:spPr>
-          <a:xfrm>
-            <a:off x="6629400" y="3611880"/>
+          <p:cNvPr id="29" name="TextBox 28"/>
+          <p:cNvSpPr txBox="1"/>
+          <p:nvPr/>
+        </p:nvSpPr>
+        <p:spPr>
+          <a:xfrm>
+            <a:off x="6629400" y="4645152"/>
             <a:ext cx="7406640" cy="877824"/>
           </a:xfrm>
           <a:prstGeom prst="rect">
@@ -30781,7 +30857,7 @@
       </p:sp>
       <p:sp>
         <p:nvSpPr>
-          <p:cNvPr id="29" name="TextBox 28"/>
+          <p:cNvPr id="30" name="TextBox 29"/>
           <p:cNvSpPr txBox="1"/>
           <p:nvPr/>
         </p:nvSpPr>
@@ -30820,7 +30896,7 @@
       </p:sp>
       <p:sp>
         <p:nvSpPr>
-          <p:cNvPr id="30" name="TextBox 29"/>
+          <p:cNvPr id="31" name="TextBox 30"/>
           <p:cNvSpPr txBox="1"/>
           <p:nvPr/>
         </p:nvSpPr>
@@ -30852,14 +30928,30 @@
               </a:defRPr>
             </a:pPr>
             <a:r>
-              <a:t>발급 실패·결과 불명 / 취소·만료·소진 / 정원10명 / 일반 참여자 권한 거부</a:t>
-            </a:r>
-          </a:p>
-        </p:txBody>
-      </p:sp>
-      <p:sp>
-        <p:nvSpPr>
-          <p:cNvPr id="31" name="TextBox 30"/>
+              <a:t>발급 실패·결과 불명 / 취소·만료·소진 / 정원10명 / 일반 참여자 동일 권한 /</a:t>
+            </a:r>
+          </a:p>
+          <a:p>
+            <a:pPr>
+              <a:spcAft>
+                <a:spcPts val="100"/>
+              </a:spcAft>
+              <a:defRPr sz="1400" b="0">
+                <a:solidFill>
+                  <a:srgbClr val="4E5968"/>
+                </a:solidFill>
+                <a:latin typeface="Noto Sans CJK KR"/>
+              </a:defRPr>
+            </a:pPr>
+            <a:r>
+              <a:t>비참여·탈퇴·퇴장·이용 제한 거부</a:t>
+            </a:r>
+          </a:p>
+        </p:txBody>
+      </p:sp>
+      <p:sp>
+        <p:nvSpPr>
+          <p:cNvPr id="32" name="TextBox 31"/>
           <p:cNvSpPr txBox="1"/>
           <p:nvPr/>
         </p:nvSpPr>
@@ -31030,7 +31122,7 @@
               </a:defRPr>
             </a:pPr>
             <a:r>
-              <a:t>1차 신규 설계안 · 도형/텍스트 개별 편집 가능 · F01 / F05  ·  2026-10-22</a:t>
+              <a:t>1차 신규 설계안 · 도형/텍스트 개별 편집 가능 · F01 / F05  ·  2026-10-24</a:t>
             </a:r>
           </a:p>
         </p:txBody>
@@ -32332,7 +32424,7 @@
               </a:defRPr>
             </a:pPr>
             <a:r>
-              <a:t>1차 신규 설계안 · 도형/텍스트 개별 편집 가능 · F04  ·  2026-10-22</a:t>
+              <a:t>1차 신규 설계안 · 도형/텍스트 개별 편집 가능 · F04  ·  2026-10-24</a:t>
             </a:r>
           </a:p>
         </p:txBody>
@@ -33670,7 +33762,7 @@
               </a:defRPr>
             </a:pPr>
             <a:r>
-              <a:t>1차 신규 설계안 · 도형/텍스트 개별 편집 가능 · F22 / F25  ·  2026-10-22</a:t>
+              <a:t>1차 신규 설계안 · 도형/텍스트 개별 편집 가능 · F22 / F25  ·  2026-10-24</a:t>
             </a:r>
           </a:p>
         </p:txBody>
@@ -35000,7 +35092,7 @@
               </a:defRPr>
             </a:pPr>
             <a:r>
-              <a:t>1차 신규 설계안 · 도형/텍스트 개별 편집 가능 · F22 / F23  ·  2026-10-22</a:t>
+              <a:t>1차 신규 설계안 · 도형/텍스트 개별 편집 가능 · F22 / F23  ·  2026-10-24</a:t>
             </a:r>
           </a:p>
         </p:txBody>
@@ -36388,7 +36480,7 @@
               </a:defRPr>
             </a:pPr>
             <a:r>
-              <a:t>1차 신규 설계안 · 도형/텍스트 개별 편집 가능 · F02 / F18 / F24 / F28  ·  2026-10-22</a:t>
+              <a:t>1차 신규 설계안 · 도형/텍스트 개별 편집 가능 · F02 / F18 / F24 / F28  ·  2026-10-24</a:t>
             </a:r>
           </a:p>
         </p:txBody>
@@ -37867,7 +37959,7 @@
               </a:defRPr>
             </a:pPr>
             <a:r>
-              <a:t>선행 XLSX의 브랜드 색과 간격을 Android 기준으로 정리  ·  2026-10-22</a:t>
+              <a:t>선행 XLSX의 브랜드 색과 간격을 Android 기준으로 정리  ·  2026-10-24</a:t>
             </a:r>
           </a:p>
         </p:txBody>
@@ -38609,7 +38701,7 @@
               </a:defRPr>
             </a:pPr>
             <a:r>
-              <a:t>1차 신규 설계안 · 도형/텍스트 개별 편집 가능 · F01  ·  2026-10-22</a:t>
+              <a:t>1차 신규 설계안 · 도형/텍스트 개별 편집 가능 · F01  ·  2026-10-24</a:t>
             </a:r>
           </a:p>
         </p:txBody>
@@ -39818,7 +39910,7 @@
               </a:defRPr>
             </a:pPr>
             <a:r>
-              <a:t>1차 신규 설계안 · 도형/텍스트 개별 편집 가능 · F24 / F02  ·  2026-10-22</a:t>
+              <a:t>1차 신규 설계안 · 도형/텍스트 개별 편집 가능 · F24 / F02  ·  2026-10-24</a:t>
             </a:r>
           </a:p>
         </p:txBody>
@@ -41059,7 +41151,7 @@
               </a:defRPr>
             </a:pPr>
             <a:r>
-              <a:t>1차 신규 설계안 · 도형/텍스트 개별 편집 가능 · F25 / F26  ·  2026-10-22</a:t>
+              <a:t>1차 신규 설계안 · 도형/텍스트 개별 편집 가능 · F25 / F26  ·  2026-10-24</a:t>
             </a:r>
           </a:p>
         </p:txBody>
@@ -42360,7 +42452,7 @@
               </a:defRPr>
             </a:pPr>
             <a:r>
-              <a:t>1차 신규 설계안 · 도형/텍스트 개별 편집 가능 · F27  ·  2026-10-22</a:t>
+              <a:t>1차 신규 설계안 · 도형/텍스트 개별 편집 가능 · F27  ·  2026-10-24</a:t>
             </a:r>
           </a:p>
         </p:txBody>
@@ -43714,7 +43806,7 @@
               </a:defRPr>
             </a:pPr>
             <a:r>
-              <a:t>1차 신규 설계안 · 도형/텍스트 개별 편집 가능 · F28  ·  2026-10-22</a:t>
+              <a:t>1차 신규 설계안 · 도형/텍스트 개별 편집 가능 · F28  ·  2026-10-24</a:t>
             </a:r>
           </a:p>
         </p:txBody>
@@ -45064,7 +45156,7 @@
               </a:defRPr>
             </a:pPr>
             <a:r>
-              <a:t>1차 신규 설계안 · 도형/텍스트 개별 편집 가능 · F25 / F26 / F27  ·  2026-10-22</a:t>
+              <a:t>1차 신규 설계안 · 도형/텍스트 개별 편집 가능 · F25 / F26 / F27  ·  2026-10-24</a:t>
             </a:r>
           </a:p>
         </p:txBody>
@@ -46483,7 +46575,7 @@
               </a:defRPr>
             </a:pPr>
             <a:r>
-              <a:t>1차 신규 설계안 · 도형/텍스트 개별 편집 가능 · F01 / F08 / F15 / F28  ·  2026-10-22</a:t>
+              <a:t>1차 신규 설계안 · 도형/텍스트 개별 편집 가능 · F01 / F08 / F15 / F28  ·  2026-10-24</a:t>
             </a:r>
           </a:p>
         </p:txBody>
@@ -47749,7 +47841,7 @@
               </a:defRPr>
             </a:pPr>
             <a:r>
-              <a:t>원본 스크린샷 · 이번 실행 · 설계안/실서비스 검수 결과와 구분  ·  2026-10-22</a:t>
+              <a:t>원본 스크린샷 · 이번 실행 · 설계안/실서비스 검수 결과와 구분  ·  2026-10-24</a:t>
             </a:r>
           </a:p>
         </p:txBody>
@@ -48077,7 +48169,7 @@
               </a:defRPr>
             </a:pPr>
             <a:r>
-              <a:t>원본 스크린샷 · 이번 실행 · 설계안/실서비스 검수 결과와 구분  ·  2026-10-22</a:t>
+              <a:t>원본 스크린샷 · 이번 실행 · 설계안/실서비스 검수 결과와 구분  ·  2026-10-24</a:t>
             </a:r>
           </a:p>
         </p:txBody>
@@ -48405,7 +48497,7 @@
               </a:defRPr>
             </a:pPr>
             <a:r>
-              <a:t>원본 스크린샷 · 이번 실행 · 설계안/실서비스 검수 결과와 구분  ·  2026-10-22</a:t>
+              <a:t>원본 스크린샷 · 이번 실행 · 설계안/실서비스 검수 결과와 구분  ·  2026-10-24</a:t>
             </a:r>
           </a:p>
         </p:txBody>
@@ -48733,7 +48825,7 @@
               </a:defRPr>
             </a:pPr>
             <a:r>
-              <a:t>1차 신규 설계안 · 도형/텍스트 개별 편집 가능 · F01  ·  2026-10-22</a:t>
+              <a:t>1차 신규 설계안 · 도형/텍스트 개별 편집 가능 · F01  ·  2026-10-24</a:t>
             </a:r>
           </a:p>
         </p:txBody>
@@ -49879,7 +49971,7 @@
               </a:defRPr>
             </a:pPr>
             <a:r>
-              <a:t>원본 스크린샷 · 이번 실행 · 설계안/실서비스 검수 결과와 구분  ·  2026-10-22</a:t>
+              <a:t>원본 스크린샷 · 이번 실행 · 설계안/실서비스 검수 결과와 구분  ·  2026-10-24</a:t>
             </a:r>
           </a:p>
         </p:txBody>
@@ -50207,7 +50299,7 @@
               </a:defRPr>
             </a:pPr>
             <a:r>
-              <a:t>원본 스크린샷 · 이번 실행 · 설계안/실서비스 검수 결과와 구분  ·  2026-10-22</a:t>
+              <a:t>원본 스크린샷 · 이번 실행 · 설계안/실서비스 검수 결과와 구분  ·  2026-10-24</a:t>
             </a:r>
           </a:p>
         </p:txBody>
@@ -50535,7 +50627,7 @@
               </a:defRPr>
             </a:pPr>
             <a:r>
-              <a:t>원본 스크린샷 · 이번 실행 · 설계안/실서비스 검수 결과와 구분  ·  2026-10-22</a:t>
+              <a:t>원본 스크린샷 · 이번 실행 · 설계안/실서비스 검수 결과와 구분  ·  2026-10-24</a:t>
             </a:r>
           </a:p>
         </p:txBody>
@@ -50863,7 +50955,7 @@
               </a:defRPr>
             </a:pPr>
             <a:r>
-              <a:t>원본 스크린샷 · 이번 실행 · 설계안/실서비스 검수 결과와 구분  ·  2026-10-22</a:t>
+              <a:t>원본 스크린샷 · 이번 실행 · 설계안/실서비스 검수 결과와 구분  ·  2026-10-24</a:t>
             </a:r>
           </a:p>
         </p:txBody>
@@ -51191,7 +51283,7 @@
               </a:defRPr>
             </a:pPr>
             <a:r>
-              <a:t>원본 스크린샷 · 이번 실행 · 설계안/실서비스 검수 결과와 구분  ·  2026-10-22</a:t>
+              <a:t>원본 스크린샷 · 이번 실행 · 설계안/실서비스 검수 결과와 구분  ·  2026-10-24</a:t>
             </a:r>
           </a:p>
         </p:txBody>
@@ -51519,7 +51611,7 @@
               </a:defRPr>
             </a:pPr>
             <a:r>
-              <a:t>원본 스크린샷 · 이번 실행 · 설계안/실서비스 검수 결과와 구분  ·  2026-10-22</a:t>
+              <a:t>원본 스크린샷 · 이번 실행 · 설계안/실서비스 검수 결과와 구분  ·  2026-10-24</a:t>
             </a:r>
           </a:p>
         </p:txBody>
@@ -51847,7 +51939,7 @@
               </a:defRPr>
             </a:pPr>
             <a:r>
-              <a:t>원본 스크린샷 · 이번 실행 · 설계안/실서비스 검수 결과와 구분  ·  2026-10-22</a:t>
+              <a:t>원본 스크린샷 · 이번 실행 · 설계안/실서비스 검수 결과와 구분  ·  2026-10-24</a:t>
             </a:r>
           </a:p>
         </p:txBody>
@@ -52175,7 +52267,7 @@
               </a:defRPr>
             </a:pPr>
             <a:r>
-              <a:t>원본 스크린샷 · 이번 실행 · 설계안/실서비스 검수 결과와 구분  ·  2026-10-22</a:t>
+              <a:t>원본 스크린샷 · 이번 실행 · 설계안/실서비스 검수 결과와 구분  ·  2026-10-24</a:t>
             </a:r>
           </a:p>
         </p:txBody>
@@ -52503,7 +52595,7 @@
               </a:defRPr>
             </a:pPr>
             <a:r>
-              <a:t>원본 스크린샷 · 이번 실행 · 설계안/실서비스 검수 결과와 구분  ·  2026-10-22</a:t>
+              <a:t>원본 스크린샷 · 이번 실행 · 설계안/실서비스 검수 결과와 구분  ·  2026-10-24</a:t>
             </a:r>
           </a:p>
         </p:txBody>
@@ -52831,7 +52923,7 @@
               </a:defRPr>
             </a:pPr>
             <a:r>
-              <a:t>원본 스크린샷 · 이번 실행 · 설계안/실서비스 검수 결과와 구분  ·  2026-10-22</a:t>
+              <a:t>원본 스크린샷 · 이번 실행 · 설계안/실서비스 검수 결과와 구분  ·  2026-10-24</a:t>
             </a:r>
           </a:p>
         </p:txBody>
@@ -53159,7 +53251,7 @@
               </a:defRPr>
             </a:pPr>
             <a:r>
-              <a:t>1차 신규 설계안 · 도형/텍스트 개별 편집 가능 · F02  ·  2026-10-22</a:t>
+              <a:t>1차 신규 설계안 · 도형/텍스트 개별 편집 가능 · F02  ·  2026-10-24</a:t>
             </a:r>
           </a:p>
         </p:txBody>
@@ -54524,7 +54616,7 @@
               </a:defRPr>
             </a:pPr>
             <a:r>
-              <a:t>원본 스크린샷 · 이번 실행 · 설계안/실서비스 검수 결과와 구분  ·  2026-10-22</a:t>
+              <a:t>원본 스크린샷 · 이번 실행 · 설계안/실서비스 검수 결과와 구분  ·  2026-10-24</a:t>
             </a:r>
           </a:p>
         </p:txBody>
@@ -54852,7 +54944,7 @@
               </a:defRPr>
             </a:pPr>
             <a:r>
-              <a:t>1차 신규 설계안 · 도형/텍스트 개별 편집 가능 · F03 / F21 / F28  ·  2026-10-22</a:t>
+              <a:t>1차 신규 설계안 · 도형/텍스트 개별 편집 가능 · F03 / F21 / F28  ·  2026-10-24</a:t>
             </a:r>
           </a:p>
         </p:txBody>
@@ -56230,7 +56322,7 @@
               </a:defRPr>
             </a:pPr>
             <a:r>
-              <a:t>1차 신규 설계안 · 도형/텍스트 개별 편집 가능 · F03 / F07  ·  2026-10-22</a:t>
+              <a:t>1차 신규 설계안 · 도형/텍스트 개별 편집 가능 · F03 / F07  ·  2026-10-24</a:t>
             </a:r>
           </a:p>
         </p:txBody>
@@ -57598,7 +57690,7 @@
               </a:defRPr>
             </a:pPr>
             <a:r>
-              <a:t>1차 신규 설계안 · 도형/텍스트 개별 편집 가능 · F06 / F07 / F08 / F11  ·  2026-10-22</a:t>
+              <a:t>1차 신규 설계안 · 도형/텍스트 개별 편집 가능 · F06 / F07 / F08 / F11  ·  2026-10-24</a:t>
             </a:r>
           </a:p>
         </p:txBody>
@@ -59848,7 +59940,7 @@
         </p:nvSpPr>
         <p:spPr>
           <a:xfrm>
-            <a:off x="746056" y="6056780"/>
+            <a:off x="746056" y="6136872"/>
             <a:ext cx="2302646" cy="349357"/>
           </a:xfrm>
           <a:prstGeom prst="rect">
@@ -59874,23 +59966,7 @@
               </a:defRPr>
             </a:pPr>
             <a:r>
-              <a:t>③ 달력 / 일정 목록   ·   모임 관리</a:t>
-            </a:r>
-          </a:p>
-          <a:p>
-            <a:pPr>
-              <a:spcAft>
-                <a:spcPts val="100"/>
-              </a:spcAft>
-              <a:defRPr sz="900" b="0">
-                <a:solidFill>
-                  <a:srgbClr val="191F28"/>
-                </a:solidFill>
-                <a:latin typeface="Noto Sans CJK KR"/>
-              </a:defRPr>
-            </a:pPr>
-            <a:r>
-              <a:t>&gt;</a:t>
+              <a:t>③ 달력 / 일정 목록  ·  초대·관리 &gt;</a:t>
             </a:r>
           </a:p>
         </p:txBody>
@@ -60362,7 +60438,7 @@
               </a:defRPr>
             </a:pPr>
             <a:r>
-              <a:t>③ 보기 방식은 기기에 보관한다. ④ 현재 방장만 UI06에서 일정을</a:t>
+              <a:t>③ 초대·관리에서 모든 현재 참여자가 UI23에 진입한다. 보기</a:t>
             </a:r>
           </a:p>
           <a:p>
@@ -60378,7 +60454,7 @@
               </a:defRPr>
             </a:pPr>
             <a:r>
-              <a:t>수동 추가한다. 반복 생성은 없다. 뒤로 오면 월·선택·스크롤을</a:t>
+              <a:t>방식은 기기에 보관한다. ④ 현재 방장만 UI06에서 일정을 수동</a:t>
             </a:r>
           </a:p>
           <a:p>
@@ -60394,7 +60470,7 @@
               </a:defRPr>
             </a:pPr>
             <a:r>
-              <a:t>복원한다.</a:t>
+              <a:t>추가한다. 반복 생성은 없다. 뒤로 오면 월·선택·스크롤을 복원한다.</a:t>
             </a:r>
           </a:p>
         </p:txBody>
@@ -60666,7 +60742,7 @@
               </a:defRPr>
             </a:pPr>
             <a:r>
-              <a:t>1차 신규 설계안 · 도형/텍스트 개별 편집 가능 · F07 / F08 / F11  ·  2026-10-22</a:t>
+              <a:t>1차 신규 설계안 · 도형/텍스트 개별 편집 가능 · F07 / F08 / F11  ·  2026-10-24</a:t>
             </a:r>
           </a:p>
         </p:txBody>
